--- a/Modul Minna 2/Bab 49/49. Minna 2 Tata Bahasa Bab 49 - Slide.pptx
+++ b/Modul Minna 2/Bab 49/49. Minna 2 Tata Bahasa Bab 49 - Slide.pptx
@@ -5266,7 +5266,7 @@
                 <a:ea typeface="Arial" pitchFamily="34" charset="-122"/>
                 <a:cs typeface="Arial" pitchFamily="34" charset="-120"/>
               </a:rPr>
-              <a:t>Sdr. Andi demam, sehingga pagi ini kurang sehat.</a:t>
+              <a:t>Andi demam, sehingga pagi ini kurang sehat.</a:t>
             </a:r>
             <a:endParaRPr lang="en-US" sz="950" dirty="0"/>
           </a:p>
